--- a/Documentation/PPT_FINAL_DA.pptx
+++ b/Documentation/PPT_FINAL_DA.pptx
@@ -10278,27 +10278,7 @@
                   </a:schemeClr>
                 </a:solidFill>
               </a:rPr>
-              <a:t>The Key Influencer Analysis </a:t>
-            </a:r>
-            <a:r>
-              <a:rPr lang="en-IN" sz="1100" b="1" dirty="0" err="1">
-                <a:solidFill>
-                  <a:schemeClr val="bg2">
-                    <a:lumMod val="25000"/>
-                  </a:schemeClr>
-                </a:solidFill>
-              </a:rPr>
-              <a:t>identifiedsocial</a:t>
-            </a:r>
-            <a:r>
-              <a:rPr lang="en-IN" sz="1100" b="1" dirty="0">
-                <a:solidFill>
-                  <a:schemeClr val="bg2">
-                    <a:lumMod val="25000"/>
-                  </a:schemeClr>
-                </a:solidFill>
-              </a:rPr>
-              <a:t> comparison as the strongest factor contributing to higher depression levels. The correlation heatmap further highlights strong positive relationships among major mental health indicators, particularly depression and worry</a:t>
+              <a:t>The Key Influencer Analysis identifiedsocial comparison as the strongest factor contributing to higher depression levels. The correlation heatmap further highlights strong positive relationships among major mental health indicators, particularly depression and worry</a:t>
             </a:r>
           </a:p>
         </p:txBody>
@@ -10982,6 +10962,13 @@
           </a:solidFill>
           <a:ln/>
         </p:spPr>
+        <p:txBody>
+          <a:bodyPr/>
+          <a:lstStyle/>
+          <a:p>
+            <a:endParaRPr lang="en-IN"/>
+          </a:p>
+        </p:txBody>
       </p:sp>
       <p:sp>
         <p:nvSpPr>
@@ -14783,14 +14770,6 @@
               </a:rPr>
               <a:t>73%</a:t>
             </a:r>
-            <a:r>
-              <a:rPr lang="en-US" sz="2000" b="1" dirty="0">
-                <a:solidFill>
-                  <a:srgbClr val="215287"/>
-                </a:solidFill>
-              </a:rPr>
-              <a:t>(290)</a:t>
-            </a:r>
             <a:endParaRPr lang="en-US" sz="2000" dirty="0">
               <a:solidFill>
                 <a:srgbClr val="215287"/>
@@ -14885,14 +14864,11 @@
               </a:rPr>
               <a:t>58%</a:t>
             </a:r>
-            <a:r>
-              <a:rPr lang="en-US" sz="2000" b="1" dirty="0">
-                <a:solidFill>
-                  <a:srgbClr val="215287"/>
-                </a:solidFill>
-              </a:rPr>
-              <a:t>(230)</a:t>
-            </a:r>
+            <a:endParaRPr lang="en-US" sz="2000" b="1" dirty="0">
+              <a:solidFill>
+                <a:srgbClr val="215287"/>
+              </a:solidFill>
+            </a:endParaRPr>
           </a:p>
           <a:p>
             <a:endParaRPr lang="en-US" sz="1400" dirty="0">
